--- a/course/3d_slides_w3.pptx
+++ b/course/3d_slides_w3.pptx
@@ -148,6 +148,9 @@
     <p:ext uri="{EFAFB233-063F-42B5-8137-9DF3F51BA10A}">
       <p15:sldGuideLst xmlns:p15="http://schemas.microsoft.com/office/powerpoint/2012/main"/>
     </p:ext>
+    <p:ext uri="{2D200454-40CA-4A62-9FC3-DE9A4176ACB9}">
+      <p15:notesGuideLst xmlns:p15="http://schemas.microsoft.com/office/powerpoint/2012/main"/>
+    </p:ext>
   </p:extLst>
 </p:presentation>
 </file>
@@ -234,7 +237,7 @@
           <a:p>
             <a:fld id="{64F484BD-A9A3-4CBB-88D6-39267B7F5B46}" type="datetimeFigureOut">
               <a:rPr lang="en-BE" smtClean="0"/>
-              <a:t>27/02/2025</a:t>
+              <a:t>30/05/2025</a:t>
             </a:fld>
             <a:endParaRPr lang="en-BE"/>
           </a:p>
@@ -2444,7 +2447,43 @@
           <a:bodyPr/>
           <a:lstStyle/>
           <a:p>
-            <a:endParaRPr lang="en-BE"/>
+            <a:r>
+              <a:rPr lang="en-US" dirty="0"/>
+              <a:t>Look for symmetry in your code. If you have a triple loop over each dimension, the loop heads should look similar. This is true in all code, but especially graphics code can have multiple dimensions (</a:t>
+            </a:r>
+            <a:r>
+              <a:rPr lang="en-US" dirty="0" err="1"/>
+              <a:t>rgb</a:t>
+            </a:r>
+            <a:r>
+              <a:rPr lang="en-US" dirty="0"/>
+              <a:t>, </a:t>
+            </a:r>
+            <a:r>
+              <a:rPr lang="en-US" dirty="0" err="1"/>
+              <a:t>xyz</a:t>
+            </a:r>
+            <a:r>
+              <a:rPr lang="en-US" dirty="0"/>
+              <a:t>, </a:t>
+            </a:r>
+            <a:r>
+              <a:rPr lang="en-US" dirty="0" err="1"/>
+              <a:t>uv</a:t>
+            </a:r>
+            <a:r>
+              <a:rPr lang="en-US" dirty="0"/>
+              <a:t>) where you treat each axis the same). This leads to symmetry.</a:t>
+            </a:r>
+          </a:p>
+          <a:p>
+            <a:endParaRPr lang="en-US" dirty="0"/>
+          </a:p>
+          <a:p>
+            <a:r>
+              <a:rPr lang="en-US" dirty="0"/>
+              <a:t>And, of course, don’t trust AI with code you can’t write yourself, as you won’t be able to spot / fix any mistakes</a:t>
+            </a:r>
           </a:p>
         </p:txBody>
       </p:sp>
@@ -5998,7 +6037,7 @@
           <a:p>
             <a:fld id="{B21044C9-3718-44C4-9063-5DAD08408240}" type="datetimeFigureOut">
               <a:rPr lang="en-BE" smtClean="0"/>
-              <a:t>27/02/2025</a:t>
+              <a:t>30/05/2025</a:t>
             </a:fld>
             <a:endParaRPr lang="en-BE"/>
           </a:p>
@@ -6198,7 +6237,7 @@
           <a:p>
             <a:fld id="{B21044C9-3718-44C4-9063-5DAD08408240}" type="datetimeFigureOut">
               <a:rPr lang="en-BE" smtClean="0"/>
-              <a:t>27/02/2025</a:t>
+              <a:t>30/05/2025</a:t>
             </a:fld>
             <a:endParaRPr lang="en-BE"/>
           </a:p>
@@ -6408,7 +6447,7 @@
           <a:p>
             <a:fld id="{B21044C9-3718-44C4-9063-5DAD08408240}" type="datetimeFigureOut">
               <a:rPr lang="en-BE" smtClean="0"/>
-              <a:t>27/02/2025</a:t>
+              <a:t>30/05/2025</a:t>
             </a:fld>
             <a:endParaRPr lang="en-BE"/>
           </a:p>
@@ -6550,7 +6589,7 @@
           <a:p>
             <a:fld id="{B21044C9-3718-44C4-9063-5DAD08408240}" type="datetimeFigureOut">
               <a:rPr lang="en-BE" smtClean="0"/>
-              <a:t>27/02/2025</a:t>
+              <a:t>30/05/2025</a:t>
             </a:fld>
             <a:endParaRPr lang="en-BE"/>
           </a:p>
@@ -6750,7 +6789,7 @@
           <a:p>
             <a:fld id="{B21044C9-3718-44C4-9063-5DAD08408240}" type="datetimeFigureOut">
               <a:rPr lang="en-BE" smtClean="0"/>
-              <a:t>27/02/2025</a:t>
+              <a:t>30/05/2025</a:t>
             </a:fld>
             <a:endParaRPr lang="en-BE"/>
           </a:p>
@@ -7026,7 +7065,7 @@
           <a:p>
             <a:fld id="{B21044C9-3718-44C4-9063-5DAD08408240}" type="datetimeFigureOut">
               <a:rPr lang="en-BE" smtClean="0"/>
-              <a:t>27/02/2025</a:t>
+              <a:t>30/05/2025</a:t>
             </a:fld>
             <a:endParaRPr lang="en-BE"/>
           </a:p>
@@ -7294,7 +7333,7 @@
           <a:p>
             <a:fld id="{B21044C9-3718-44C4-9063-5DAD08408240}" type="datetimeFigureOut">
               <a:rPr lang="en-BE" smtClean="0"/>
-              <a:t>27/02/2025</a:t>
+              <a:t>30/05/2025</a:t>
             </a:fld>
             <a:endParaRPr lang="en-BE"/>
           </a:p>
@@ -7709,7 +7748,7 @@
           <a:p>
             <a:fld id="{B21044C9-3718-44C4-9063-5DAD08408240}" type="datetimeFigureOut">
               <a:rPr lang="en-BE" smtClean="0"/>
-              <a:t>27/02/2025</a:t>
+              <a:t>30/05/2025</a:t>
             </a:fld>
             <a:endParaRPr lang="en-BE"/>
           </a:p>
@@ -7851,7 +7890,7 @@
           <a:p>
             <a:fld id="{B21044C9-3718-44C4-9063-5DAD08408240}" type="datetimeFigureOut">
               <a:rPr lang="en-BE" smtClean="0"/>
-              <a:t>27/02/2025</a:t>
+              <a:t>30/05/2025</a:t>
             </a:fld>
             <a:endParaRPr lang="en-BE"/>
           </a:p>
@@ -7964,7 +8003,7 @@
           <a:p>
             <a:fld id="{B21044C9-3718-44C4-9063-5DAD08408240}" type="datetimeFigureOut">
               <a:rPr lang="en-BE" smtClean="0"/>
-              <a:t>27/02/2025</a:t>
+              <a:t>30/05/2025</a:t>
             </a:fld>
             <a:endParaRPr lang="en-BE"/>
           </a:p>
@@ -8277,7 +8316,7 @@
           <a:p>
             <a:fld id="{B21044C9-3718-44C4-9063-5DAD08408240}" type="datetimeFigureOut">
               <a:rPr lang="en-BE" smtClean="0"/>
-              <a:t>27/02/2025</a:t>
+              <a:t>30/05/2025</a:t>
             </a:fld>
             <a:endParaRPr lang="en-BE"/>
           </a:p>
@@ -8520,7 +8559,7 @@
           <a:p>
             <a:fld id="{B21044C9-3718-44C4-9063-5DAD08408240}" type="datetimeFigureOut">
               <a:rPr lang="en-BE" smtClean="0"/>
-              <a:t>27/02/2025</a:t>
+              <a:t>30/05/2025</a:t>
             </a:fld>
             <a:endParaRPr lang="en-BE"/>
           </a:p>
@@ -12528,7 +12567,7 @@
           <a:p>
             <a:r>
               <a:rPr lang="en-US" dirty="0"/>
-              <a:t>Do these questions increase memory?</a:t>
+              <a:t>Do these transformation spaces increase memory?</a:t>
             </a:r>
             <a:endParaRPr lang="en-BE" dirty="0"/>
           </a:p>
